--- a/paper/pybc-sec/sections/graphs/pybcSEC.pptx
+++ b/paper/pybc-sec/sections/graphs/pybcSEC.pptx
@@ -5,13 +5,14 @@
     <p:sldMasterId id="2147483648" r:id="rId1"/>
   </p:sldMasterIdLst>
   <p:notesMasterIdLst>
-    <p:notesMasterId r:id="rId6"/>
+    <p:notesMasterId r:id="rId7"/>
   </p:notesMasterIdLst>
   <p:sldIdLst>
     <p:sldId id="257" r:id="rId2"/>
     <p:sldId id="258" r:id="rId3"/>
-    <p:sldId id="256" r:id="rId4"/>
-    <p:sldId id="259" r:id="rId5"/>
+    <p:sldId id="260" r:id="rId4"/>
+    <p:sldId id="256" r:id="rId5"/>
+    <p:sldId id="259" r:id="rId6"/>
   </p:sldIdLst>
   <p:sldSz cx="12192000" cy="6858000"/>
   <p:notesSz cx="6858000" cy="9144000"/>
@@ -211,7 +212,7 @@
           <a:p>
             <a:fld id="{0275BE1E-4319-48D5-88A9-F69A4B65E572}" type="datetimeFigureOut">
               <a:rPr lang="en-US" smtClean="0"/>
-              <a:t>6/3/2026</a:t>
+              <a:t>6/4/2026</a:t>
             </a:fld>
             <a:endParaRPr lang="en-US"/>
           </a:p>
@@ -670,6 +671,114 @@
   <p:cSld>
     <p:spTree>
       <p:nvGrpSpPr>
+        <p:cNvPr id="1" name="">
+          <a:extLst>
+            <a:ext uri="{FF2B5EF4-FFF2-40B4-BE49-F238E27FC236}">
+              <a16:creationId xmlns:a16="http://schemas.microsoft.com/office/drawing/2014/main" id="{C8B56194-8981-5526-6A50-DCDA44CF1603}"/>
+            </a:ext>
+          </a:extLst>
+        </p:cNvPr>
+        <p:cNvGrpSpPr/>
+        <p:nvPr/>
+      </p:nvGrpSpPr>
+      <p:grpSpPr>
+        <a:xfrm>
+          <a:off x="0" y="0"/>
+          <a:ext cx="0" cy="0"/>
+          <a:chOff x="0" y="0"/>
+          <a:chExt cx="0" cy="0"/>
+        </a:xfrm>
+      </p:grpSpPr>
+      <p:sp>
+        <p:nvSpPr>
+          <p:cNvPr id="2" name="Slide Image Placeholder 1">
+            <a:extLst>
+              <a:ext uri="{FF2B5EF4-FFF2-40B4-BE49-F238E27FC236}">
+                <a16:creationId xmlns:a16="http://schemas.microsoft.com/office/drawing/2014/main" id="{848BF064-70A4-67BB-9886-4DCCF247CE65}"/>
+              </a:ext>
+            </a:extLst>
+          </p:cNvPr>
+          <p:cNvSpPr>
+            <a:spLocks noGrp="1" noRot="1" noChangeAspect="1"/>
+          </p:cNvSpPr>
+          <p:nvPr>
+            <p:ph type="sldImg"/>
+          </p:nvPr>
+        </p:nvSpPr>
+        <p:spPr/>
+      </p:sp>
+      <p:sp>
+        <p:nvSpPr>
+          <p:cNvPr id="3" name="Notes Placeholder 2">
+            <a:extLst>
+              <a:ext uri="{FF2B5EF4-FFF2-40B4-BE49-F238E27FC236}">
+                <a16:creationId xmlns:a16="http://schemas.microsoft.com/office/drawing/2014/main" id="{6DF30B8E-08B4-1653-6916-0A0D8D4E5732}"/>
+              </a:ext>
+            </a:extLst>
+          </p:cNvPr>
+          <p:cNvSpPr>
+            <a:spLocks noGrp="1"/>
+          </p:cNvSpPr>
+          <p:nvPr>
+            <p:ph type="body" idx="1"/>
+          </p:nvPr>
+        </p:nvSpPr>
+        <p:spPr/>
+        <p:txBody>
+          <a:bodyPr/>
+          <a:lstStyle/>
+          <a:p>
+            <a:endParaRPr lang="en-US" dirty="0"/>
+          </a:p>
+        </p:txBody>
+      </p:sp>
+      <p:sp>
+        <p:nvSpPr>
+          <p:cNvPr id="4" name="Slide Number Placeholder 3">
+            <a:extLst>
+              <a:ext uri="{FF2B5EF4-FFF2-40B4-BE49-F238E27FC236}">
+                <a16:creationId xmlns:a16="http://schemas.microsoft.com/office/drawing/2014/main" id="{513B4C6A-84B4-88ED-34E5-2B69F2387BF6}"/>
+              </a:ext>
+            </a:extLst>
+          </p:cNvPr>
+          <p:cNvSpPr>
+            <a:spLocks noGrp="1"/>
+          </p:cNvSpPr>
+          <p:nvPr>
+            <p:ph type="sldNum" sz="quarter" idx="10"/>
+          </p:nvPr>
+        </p:nvSpPr>
+        <p:spPr/>
+        <p:txBody>
+          <a:bodyPr/>
+          <a:lstStyle/>
+          <a:p>
+            <a:fld id="{F7021451-1387-4CA6-816F-3879F97B5CBC}" type="slidenum">
+              <a:rPr lang="en-US"/>
+              <a:t>3</a:t>
+            </a:fld>
+            <a:endParaRPr lang="en-US"/>
+          </a:p>
+        </p:txBody>
+      </p:sp>
+    </p:spTree>
+    <p:extLst>
+      <p:ext uri="{BB962C8B-B14F-4D97-AF65-F5344CB8AC3E}">
+        <p14:creationId xmlns:p14="http://schemas.microsoft.com/office/powerpoint/2010/main" val="2492137428"/>
+      </p:ext>
+    </p:extLst>
+  </p:cSld>
+  <p:clrMapOvr>
+    <a:masterClrMapping/>
+  </p:clrMapOvr>
+</p:notes>
+</file>
+
+<file path=ppt/notesSlides/notesSlide4.xml><?xml version="1.0" encoding="utf-8"?>
+<p:notes xmlns:a="http://schemas.openxmlformats.org/drawingml/2006/main" xmlns:r="http://schemas.openxmlformats.org/officeDocument/2006/relationships" xmlns:p="http://schemas.openxmlformats.org/presentationml/2006/main">
+  <p:cSld>
+    <p:spTree>
+      <p:nvGrpSpPr>
         <p:cNvPr id="1" name=""/>
         <p:cNvGrpSpPr/>
         <p:nvPr/>
@@ -730,7 +839,7 @@
           <a:p>
             <a:fld id="{F7021451-1387-4CA6-816F-3879F97B5CBC}" type="slidenum">
               <a:rPr lang="en-US"/>
-              <a:t>3</a:t>
+              <a:t>4</a:t>
             </a:fld>
             <a:endParaRPr lang="en-US"/>
           </a:p>
@@ -744,7 +853,7 @@
 </p:notes>
 </file>
 
-<file path=ppt/notesSlides/notesSlide4.xml><?xml version="1.0" encoding="utf-8"?>
+<file path=ppt/notesSlides/notesSlide5.xml><?xml version="1.0" encoding="utf-8"?>
 <p:notes xmlns:a="http://schemas.openxmlformats.org/drawingml/2006/main" xmlns:r="http://schemas.openxmlformats.org/officeDocument/2006/relationships" xmlns:p="http://schemas.openxmlformats.org/presentationml/2006/main">
   <p:cSld>
     <p:spTree>
@@ -833,7 +942,7 @@
           <a:p>
             <a:fld id="{F7021451-1387-4CA6-816F-3879F97B5CBC}" type="slidenum">
               <a:rPr lang="en-US"/>
-              <a:t>4</a:t>
+              <a:t>5</a:t>
             </a:fld>
             <a:endParaRPr lang="en-US"/>
           </a:p>
@@ -981,7 +1090,7 @@
           <a:p>
             <a:fld id="{D997B5FA-0921-464F-AAE1-844C04324D75}" type="datetimeFigureOut">
               <a:rPr lang="zh-CN" altLang="en-US" smtClean="0"/>
-              <a:t>2026/6/3</a:t>
+              <a:t>2026/6/4</a:t>
             </a:fld>
             <a:endParaRPr lang="zh-CN" altLang="en-US"/>
           </a:p>
@@ -1144,7 +1253,7 @@
           <a:p>
             <a:fld id="{D997B5FA-0921-464F-AAE1-844C04324D75}" type="datetimeFigureOut">
               <a:rPr lang="zh-CN" altLang="en-US" smtClean="0"/>
-              <a:t>2026/6/3</a:t>
+              <a:t>2026/6/4</a:t>
             </a:fld>
             <a:endParaRPr lang="zh-CN" altLang="en-US"/>
           </a:p>
@@ -1317,7 +1426,7 @@
           <a:p>
             <a:fld id="{D997B5FA-0921-464F-AAE1-844C04324D75}" type="datetimeFigureOut">
               <a:rPr lang="zh-CN" altLang="en-US" smtClean="0"/>
-              <a:t>2026/6/3</a:t>
+              <a:t>2026/6/4</a:t>
             </a:fld>
             <a:endParaRPr lang="zh-CN" altLang="en-US"/>
           </a:p>
@@ -1553,7 +1662,7 @@
           <a:p>
             <a:fld id="{D997B5FA-0921-464F-AAE1-844C04324D75}" type="datetimeFigureOut">
               <a:rPr lang="zh-CN" altLang="en-US" smtClean="0"/>
-              <a:t>2026/6/3</a:t>
+              <a:t>2026/6/4</a:t>
             </a:fld>
             <a:endParaRPr lang="zh-CN" altLang="en-US"/>
           </a:p>
@@ -1793,7 +1902,7 @@
           <a:p>
             <a:fld id="{D997B5FA-0921-464F-AAE1-844C04324D75}" type="datetimeFigureOut">
               <a:rPr lang="zh-CN" altLang="en-US" smtClean="0"/>
-              <a:t>2026/6/3</a:t>
+              <a:t>2026/6/4</a:t>
             </a:fld>
             <a:endParaRPr lang="zh-CN" altLang="en-US"/>
           </a:p>
@@ -2017,7 +2126,7 @@
           <a:p>
             <a:fld id="{D997B5FA-0921-464F-AAE1-844C04324D75}" type="datetimeFigureOut">
               <a:rPr lang="zh-CN" altLang="en-US" smtClean="0"/>
-              <a:t>2026/6/3</a:t>
+              <a:t>2026/6/4</a:t>
             </a:fld>
             <a:endParaRPr lang="zh-CN" altLang="en-US"/>
           </a:p>
@@ -2376,7 +2485,7 @@
           <a:p>
             <a:fld id="{D997B5FA-0921-464F-AAE1-844C04324D75}" type="datetimeFigureOut">
               <a:rPr lang="zh-CN" altLang="en-US" smtClean="0"/>
-              <a:t>2026/6/3</a:t>
+              <a:t>2026/6/4</a:t>
             </a:fld>
             <a:endParaRPr lang="zh-CN" altLang="en-US"/>
           </a:p>
@@ -2488,7 +2597,7 @@
           <a:p>
             <a:fld id="{D997B5FA-0921-464F-AAE1-844C04324D75}" type="datetimeFigureOut">
               <a:rPr lang="zh-CN" altLang="en-US" smtClean="0"/>
-              <a:t>2026/6/3</a:t>
+              <a:t>2026/6/4</a:t>
             </a:fld>
             <a:endParaRPr lang="zh-CN" altLang="en-US"/>
           </a:p>
@@ -2578,7 +2687,7 @@
           <a:p>
             <a:fld id="{D997B5FA-0921-464F-AAE1-844C04324D75}" type="datetimeFigureOut">
               <a:rPr lang="zh-CN" altLang="en-US" smtClean="0"/>
-              <a:t>2026/6/3</a:t>
+              <a:t>2026/6/4</a:t>
             </a:fld>
             <a:endParaRPr lang="zh-CN" altLang="en-US"/>
           </a:p>
@@ -2848,7 +2957,7 @@
           <a:p>
             <a:fld id="{D997B5FA-0921-464F-AAE1-844C04324D75}" type="datetimeFigureOut">
               <a:rPr lang="zh-CN" altLang="en-US" smtClean="0"/>
-              <a:t>2026/6/3</a:t>
+              <a:t>2026/6/4</a:t>
             </a:fld>
             <a:endParaRPr lang="zh-CN" altLang="en-US"/>
           </a:p>
@@ -3095,7 +3204,7 @@
           <a:p>
             <a:fld id="{D997B5FA-0921-464F-AAE1-844C04324D75}" type="datetimeFigureOut">
               <a:rPr lang="zh-CN" altLang="en-US" smtClean="0"/>
-              <a:t>2026/6/3</a:t>
+              <a:t>2026/6/4</a:t>
             </a:fld>
             <a:endParaRPr lang="zh-CN" altLang="en-US"/>
           </a:p>
@@ -3301,7 +3410,7 @@
           <a:p>
             <a:fld id="{D997B5FA-0921-464F-AAE1-844C04324D75}" type="datetimeFigureOut">
               <a:rPr lang="zh-CN" altLang="en-US" smtClean="0"/>
-              <a:t>2026/6/3</a:t>
+              <a:t>2026/6/4</a:t>
             </a:fld>
             <a:endParaRPr lang="zh-CN" altLang="en-US"/>
           </a:p>
@@ -7360,6 +7469,1197 @@
   <p:cSld>
     <p:spTree>
       <p:nvGrpSpPr>
+        <p:cNvPr id="1" name="">
+          <a:extLst>
+            <a:ext uri="{FF2B5EF4-FFF2-40B4-BE49-F238E27FC236}">
+              <a16:creationId xmlns:a16="http://schemas.microsoft.com/office/drawing/2014/main" id="{33D45FB3-BAB0-D47D-A724-36E7CE6B1191}"/>
+            </a:ext>
+          </a:extLst>
+        </p:cNvPr>
+        <p:cNvGrpSpPr/>
+        <p:nvPr/>
+      </p:nvGrpSpPr>
+      <p:grpSpPr>
+        <a:xfrm>
+          <a:off x="0" y="0"/>
+          <a:ext cx="0" cy="0"/>
+          <a:chOff x="0" y="0"/>
+          <a:chExt cx="0" cy="0"/>
+        </a:xfrm>
+      </p:grpSpPr>
+      <p:sp>
+        <p:nvSpPr>
+          <p:cNvPr id="35" name="Cylinder 34">
+            <a:extLst>
+              <a:ext uri="{FF2B5EF4-FFF2-40B4-BE49-F238E27FC236}">
+                <a16:creationId xmlns:a16="http://schemas.microsoft.com/office/drawing/2014/main" id="{32414135-1A2B-D35D-A88F-7A59C61D205D}"/>
+              </a:ext>
+            </a:extLst>
+          </p:cNvPr>
+          <p:cNvSpPr/>
+          <p:nvPr/>
+        </p:nvSpPr>
+        <p:spPr>
+          <a:xfrm>
+            <a:off x="983294" y="2440698"/>
+            <a:ext cx="1088698" cy="363894"/>
+          </a:xfrm>
+          <a:prstGeom prst="can">
+            <a:avLst/>
+          </a:prstGeom>
+          <a:noFill/>
+        </p:spPr>
+        <p:style>
+          <a:lnRef idx="2">
+            <a:schemeClr val="accent1">
+              <a:shade val="15000"/>
+            </a:schemeClr>
+          </a:lnRef>
+          <a:fillRef idx="1">
+            <a:schemeClr val="accent1"/>
+          </a:fillRef>
+          <a:effectRef idx="0">
+            <a:schemeClr val="accent1"/>
+          </a:effectRef>
+          <a:fontRef idx="minor">
+            <a:schemeClr val="lt1"/>
+          </a:fontRef>
+        </p:style>
+        <p:txBody>
+          <a:bodyPr lIns="0" tIns="0" rIns="0" bIns="0" rtlCol="0" anchor="ctr"/>
+          <a:lstStyle/>
+          <a:p>
+            <a:pPr algn="ctr"/>
+            <a:r>
+              <a:rPr lang="en-US" sz="1100" b="1" dirty="0" err="1">
+                <a:solidFill>
+                  <a:schemeClr val="tx1"/>
+                </a:solidFill>
+              </a:rPr>
+              <a:t>PyPI</a:t>
+            </a:r>
+            <a:r>
+              <a:rPr lang="en-US" sz="1100" b="1" dirty="0">
+                <a:solidFill>
+                  <a:schemeClr val="tx1"/>
+                </a:solidFill>
+              </a:rPr>
+              <a:t> distributions</a:t>
+            </a:r>
+          </a:p>
+        </p:txBody>
+      </p:sp>
+      <p:sp>
+        <p:nvSpPr>
+          <p:cNvPr id="36" name="Rectangle 35">
+            <a:extLst>
+              <a:ext uri="{FF2B5EF4-FFF2-40B4-BE49-F238E27FC236}">
+                <a16:creationId xmlns:a16="http://schemas.microsoft.com/office/drawing/2014/main" id="{A7AE2785-97A7-6E83-3B4D-5BE3811506FC}"/>
+              </a:ext>
+            </a:extLst>
+          </p:cNvPr>
+          <p:cNvSpPr/>
+          <p:nvPr/>
+        </p:nvSpPr>
+        <p:spPr>
+          <a:xfrm>
+            <a:off x="2315183" y="2440698"/>
+            <a:ext cx="943582" cy="363894"/>
+          </a:xfrm>
+          <a:prstGeom prst="rect">
+            <a:avLst/>
+          </a:prstGeom>
+          <a:noFill/>
+        </p:spPr>
+        <p:style>
+          <a:lnRef idx="2">
+            <a:schemeClr val="accent1">
+              <a:shade val="15000"/>
+            </a:schemeClr>
+          </a:lnRef>
+          <a:fillRef idx="1">
+            <a:schemeClr val="accent1"/>
+          </a:fillRef>
+          <a:effectRef idx="0">
+            <a:schemeClr val="accent1"/>
+          </a:effectRef>
+          <a:fontRef idx="minor">
+            <a:schemeClr val="lt1"/>
+          </a:fontRef>
+        </p:style>
+        <p:txBody>
+          <a:bodyPr lIns="0" tIns="0" rIns="0" bIns="0" rtlCol="0" anchor="ctr"/>
+          <a:lstStyle/>
+          <a:p>
+            <a:pPr algn="ctr"/>
+            <a:r>
+              <a:rPr lang="en-US" sz="1100" b="1" dirty="0">
+                <a:solidFill>
+                  <a:schemeClr val="tx1"/>
+                </a:solidFill>
+              </a:rPr>
+              <a:t>Data Collection</a:t>
+            </a:r>
+          </a:p>
+        </p:txBody>
+      </p:sp>
+      <p:sp>
+        <p:nvSpPr>
+          <p:cNvPr id="41" name="Rectangle: Folded Corner 40">
+            <a:extLst>
+              <a:ext uri="{FF2B5EF4-FFF2-40B4-BE49-F238E27FC236}">
+                <a16:creationId xmlns:a16="http://schemas.microsoft.com/office/drawing/2014/main" id="{86D38EEE-2196-2F8C-0EB1-1DFCFD85138D}"/>
+              </a:ext>
+            </a:extLst>
+          </p:cNvPr>
+          <p:cNvSpPr/>
+          <p:nvPr/>
+        </p:nvSpPr>
+        <p:spPr>
+          <a:xfrm>
+            <a:off x="3540865" y="2440698"/>
+            <a:ext cx="603114" cy="363894"/>
+          </a:xfrm>
+          <a:prstGeom prst="foldedCorner">
+            <a:avLst/>
+          </a:prstGeom>
+          <a:solidFill>
+            <a:schemeClr val="bg1">
+              <a:lumMod val="95000"/>
+            </a:schemeClr>
+          </a:solidFill>
+        </p:spPr>
+        <p:style>
+          <a:lnRef idx="2">
+            <a:schemeClr val="accent1">
+              <a:shade val="15000"/>
+            </a:schemeClr>
+          </a:lnRef>
+          <a:fillRef idx="1">
+            <a:schemeClr val="accent1"/>
+          </a:fillRef>
+          <a:effectRef idx="0">
+            <a:schemeClr val="accent1"/>
+          </a:effectRef>
+          <a:fontRef idx="minor">
+            <a:schemeClr val="lt1"/>
+          </a:fontRef>
+        </p:style>
+        <p:txBody>
+          <a:bodyPr lIns="0" tIns="45720" rIns="0" bIns="0" rtlCol="0" anchor="ctr"/>
+          <a:lstStyle/>
+          <a:p>
+            <a:pPr algn="ctr">
+              <a:lnSpc>
+                <a:spcPts val="1100"/>
+              </a:lnSpc>
+            </a:pPr>
+            <a:r>
+              <a:rPr lang="en-US" sz="1100" b="1" dirty="0">
+                <a:solidFill>
+                  <a:schemeClr val="tx1"/>
+                </a:solidFill>
+              </a:rPr>
+              <a:t>Python</a:t>
+            </a:r>
+          </a:p>
+          <a:p>
+            <a:pPr algn="ctr">
+              <a:lnSpc>
+                <a:spcPts val="1100"/>
+              </a:lnSpc>
+            </a:pPr>
+            <a:r>
+              <a:rPr lang="en-US" sz="1100" b="1" dirty="0">
+                <a:solidFill>
+                  <a:schemeClr val="tx1"/>
+                </a:solidFill>
+              </a:rPr>
+              <a:t>artifacts</a:t>
+            </a:r>
+          </a:p>
+        </p:txBody>
+      </p:sp>
+      <p:sp>
+        <p:nvSpPr>
+          <p:cNvPr id="42" name="Rectangle 41">
+            <a:extLst>
+              <a:ext uri="{FF2B5EF4-FFF2-40B4-BE49-F238E27FC236}">
+                <a16:creationId xmlns:a16="http://schemas.microsoft.com/office/drawing/2014/main" id="{0434E9AC-5A64-C26F-DA54-580792B14BBB}"/>
+              </a:ext>
+            </a:extLst>
+          </p:cNvPr>
+          <p:cNvSpPr/>
+          <p:nvPr/>
+        </p:nvSpPr>
+        <p:spPr>
+          <a:xfrm>
+            <a:off x="4426079" y="2440698"/>
+            <a:ext cx="1653700" cy="363894"/>
+          </a:xfrm>
+          <a:prstGeom prst="rect">
+            <a:avLst/>
+          </a:prstGeom>
+          <a:noFill/>
+        </p:spPr>
+        <p:style>
+          <a:lnRef idx="2">
+            <a:schemeClr val="accent1">
+              <a:shade val="15000"/>
+            </a:schemeClr>
+          </a:lnRef>
+          <a:fillRef idx="1">
+            <a:schemeClr val="accent1"/>
+          </a:fillRef>
+          <a:effectRef idx="0">
+            <a:schemeClr val="accent1"/>
+          </a:effectRef>
+          <a:fontRef idx="minor">
+            <a:schemeClr val="lt1"/>
+          </a:fontRef>
+        </p:style>
+        <p:txBody>
+          <a:bodyPr lIns="0" tIns="45720" rIns="0" bIns="0" rtlCol="0" anchor="ctr"/>
+          <a:lstStyle/>
+          <a:p>
+            <a:pPr algn="ctr">
+              <a:lnSpc>
+                <a:spcPts val="1100"/>
+              </a:lnSpc>
+            </a:pPr>
+            <a:r>
+              <a:rPr lang="en-US" sz="1100" b="1" dirty="0">
+                <a:solidFill>
+                  <a:schemeClr val="accent1">
+                    <a:lumMod val="75000"/>
+                  </a:schemeClr>
+                </a:solidFill>
+              </a:rPr>
+              <a:t>Phase 1 (RQ1): </a:t>
+            </a:r>
+            <a:r>
+              <a:rPr lang="en-US" sz="1100" b="1" dirty="0">
+                <a:solidFill>
+                  <a:schemeClr val="tx1"/>
+                </a:solidFill>
+              </a:rPr>
+              <a:t>Bytecode</a:t>
+            </a:r>
+          </a:p>
+          <a:p>
+            <a:pPr algn="ctr">
+              <a:lnSpc>
+                <a:spcPts val="1100"/>
+              </a:lnSpc>
+            </a:pPr>
+            <a:r>
+              <a:rPr lang="en-US" sz="1100" b="1" dirty="0">
+                <a:solidFill>
+                  <a:schemeClr val="tx1"/>
+                </a:solidFill>
+              </a:rPr>
+              <a:t>Exposure and Transparency</a:t>
+            </a:r>
+          </a:p>
+        </p:txBody>
+      </p:sp>
+      <p:sp>
+        <p:nvSpPr>
+          <p:cNvPr id="43" name="Rectangle: Folded Corner 42">
+            <a:extLst>
+              <a:ext uri="{FF2B5EF4-FFF2-40B4-BE49-F238E27FC236}">
+                <a16:creationId xmlns:a16="http://schemas.microsoft.com/office/drawing/2014/main" id="{BC3D8778-75DE-09B4-576E-37597E949079}"/>
+              </a:ext>
+            </a:extLst>
+          </p:cNvPr>
+          <p:cNvSpPr/>
+          <p:nvPr/>
+        </p:nvSpPr>
+        <p:spPr>
+          <a:xfrm>
+            <a:off x="6361879" y="2440745"/>
+            <a:ext cx="869003" cy="363847"/>
+          </a:xfrm>
+          <a:prstGeom prst="foldedCorner">
+            <a:avLst/>
+          </a:prstGeom>
+          <a:solidFill>
+            <a:schemeClr val="bg1">
+              <a:lumMod val="95000"/>
+            </a:schemeClr>
+          </a:solidFill>
+        </p:spPr>
+        <p:style>
+          <a:lnRef idx="2">
+            <a:schemeClr val="accent1">
+              <a:shade val="15000"/>
+            </a:schemeClr>
+          </a:lnRef>
+          <a:fillRef idx="1">
+            <a:schemeClr val="accent1"/>
+          </a:fillRef>
+          <a:effectRef idx="0">
+            <a:schemeClr val="accent1"/>
+          </a:effectRef>
+          <a:fontRef idx="minor">
+            <a:schemeClr val="lt1"/>
+          </a:fontRef>
+        </p:style>
+        <p:txBody>
+          <a:bodyPr lIns="0" tIns="45720" rIns="0" bIns="0" rtlCol="0" anchor="ctr"/>
+          <a:lstStyle/>
+          <a:p>
+            <a:pPr algn="ctr"/>
+            <a:r>
+              <a:rPr lang="en-US" sz="1100" b="1" dirty="0">
+                <a:solidFill>
+                  <a:schemeClr val="tx1"/>
+                </a:solidFill>
+              </a:rPr>
+              <a:t>Artifacts with</a:t>
+            </a:r>
+          </a:p>
+          <a:p>
+            <a:pPr algn="ctr"/>
+            <a:r>
+              <a:rPr lang="en-US" sz="1100" b="1" dirty="0">
+                <a:solidFill>
+                  <a:schemeClr val="tx1"/>
+                </a:solidFill>
+              </a:rPr>
+              <a:t>bytecode</a:t>
+            </a:r>
+          </a:p>
+        </p:txBody>
+      </p:sp>
+      <p:sp>
+        <p:nvSpPr>
+          <p:cNvPr id="44" name="Rectangle: Folded Corner 43">
+            <a:extLst>
+              <a:ext uri="{FF2B5EF4-FFF2-40B4-BE49-F238E27FC236}">
+                <a16:creationId xmlns:a16="http://schemas.microsoft.com/office/drawing/2014/main" id="{C995463F-143D-4A45-F51B-C6D23C1CEC3B}"/>
+              </a:ext>
+            </a:extLst>
+          </p:cNvPr>
+          <p:cNvSpPr/>
+          <p:nvPr/>
+        </p:nvSpPr>
+        <p:spPr>
+          <a:xfrm>
+            <a:off x="4880036" y="3065106"/>
+            <a:ext cx="745786" cy="363894"/>
+          </a:xfrm>
+          <a:prstGeom prst="foldedCorner">
+            <a:avLst/>
+          </a:prstGeom>
+          <a:solidFill>
+            <a:schemeClr val="bg1">
+              <a:lumMod val="95000"/>
+            </a:schemeClr>
+          </a:solidFill>
+        </p:spPr>
+        <p:style>
+          <a:lnRef idx="2">
+            <a:schemeClr val="accent1">
+              <a:shade val="15000"/>
+            </a:schemeClr>
+          </a:lnRef>
+          <a:fillRef idx="1">
+            <a:schemeClr val="accent1"/>
+          </a:fillRef>
+          <a:effectRef idx="0">
+            <a:schemeClr val="accent1"/>
+          </a:effectRef>
+          <a:fontRef idx="minor">
+            <a:schemeClr val="lt1"/>
+          </a:fontRef>
+        </p:style>
+        <p:txBody>
+          <a:bodyPr lIns="0" tIns="45720" rIns="0" bIns="0" rtlCol="0" anchor="ctr"/>
+          <a:lstStyle/>
+          <a:p>
+            <a:pPr algn="ctr"/>
+            <a:r>
+              <a:rPr lang="en-US" sz="1100" b="1" dirty="0">
+                <a:solidFill>
+                  <a:schemeClr val="tx1"/>
+                </a:solidFill>
+              </a:rPr>
+              <a:t>Python</a:t>
+            </a:r>
+          </a:p>
+          <a:p>
+            <a:pPr algn="ctr"/>
+            <a:r>
+              <a:rPr lang="en-US" sz="1100" b="1" dirty="0">
+                <a:solidFill>
+                  <a:schemeClr val="tx1"/>
+                </a:solidFill>
+              </a:rPr>
+              <a:t>version list</a:t>
+            </a:r>
+          </a:p>
+        </p:txBody>
+      </p:sp>
+      <p:sp>
+        <p:nvSpPr>
+          <p:cNvPr id="45" name="Rectangle 44">
+            <a:extLst>
+              <a:ext uri="{FF2B5EF4-FFF2-40B4-BE49-F238E27FC236}">
+                <a16:creationId xmlns:a16="http://schemas.microsoft.com/office/drawing/2014/main" id="{51BB7190-E549-DFD1-C6AA-4625A994AC57}"/>
+              </a:ext>
+            </a:extLst>
+          </p:cNvPr>
+          <p:cNvSpPr/>
+          <p:nvPr/>
+        </p:nvSpPr>
+        <p:spPr>
+          <a:xfrm>
+            <a:off x="7528401" y="2440698"/>
+            <a:ext cx="1430773" cy="363894"/>
+          </a:xfrm>
+          <a:prstGeom prst="rect">
+            <a:avLst/>
+          </a:prstGeom>
+          <a:noFill/>
+        </p:spPr>
+        <p:style>
+          <a:lnRef idx="2">
+            <a:schemeClr val="accent1">
+              <a:shade val="15000"/>
+            </a:schemeClr>
+          </a:lnRef>
+          <a:fillRef idx="1">
+            <a:schemeClr val="accent1"/>
+          </a:fillRef>
+          <a:effectRef idx="0">
+            <a:schemeClr val="accent1"/>
+          </a:effectRef>
+          <a:fontRef idx="minor">
+            <a:schemeClr val="lt1"/>
+          </a:fontRef>
+        </p:style>
+        <p:txBody>
+          <a:bodyPr lIns="0" tIns="45720" rIns="0" bIns="0" rtlCol="0" anchor="ctr"/>
+          <a:lstStyle/>
+          <a:p>
+            <a:pPr algn="ctr">
+              <a:lnSpc>
+                <a:spcPts val="1100"/>
+              </a:lnSpc>
+            </a:pPr>
+            <a:r>
+              <a:rPr lang="en-US" sz="1100" b="1" dirty="0">
+                <a:solidFill>
+                  <a:schemeClr val="accent1">
+                    <a:lumMod val="75000"/>
+                  </a:schemeClr>
+                </a:solidFill>
+              </a:rPr>
+              <a:t>Phase 2 (RQ2): </a:t>
+            </a:r>
+            <a:r>
+              <a:rPr lang="en-US" sz="1100" b="1" dirty="0">
+                <a:solidFill>
+                  <a:schemeClr val="tx1"/>
+                </a:solidFill>
+              </a:rPr>
+              <a:t>Practical</a:t>
+            </a:r>
+          </a:p>
+          <a:p>
+            <a:pPr algn="ctr">
+              <a:lnSpc>
+                <a:spcPts val="1100"/>
+              </a:lnSpc>
+            </a:pPr>
+            <a:r>
+              <a:rPr lang="en-US" sz="1100" b="1" dirty="0">
+                <a:solidFill>
+                  <a:schemeClr val="tx1"/>
+                </a:solidFill>
+              </a:rPr>
+              <a:t>Analyzability</a:t>
+            </a:r>
+          </a:p>
+        </p:txBody>
+      </p:sp>
+      <p:sp>
+        <p:nvSpPr>
+          <p:cNvPr id="46" name="Rectangle 45">
+            <a:extLst>
+              <a:ext uri="{FF2B5EF4-FFF2-40B4-BE49-F238E27FC236}">
+                <a16:creationId xmlns:a16="http://schemas.microsoft.com/office/drawing/2014/main" id="{6003D5CD-643A-68D7-87C5-CD51CC2D4EBC}"/>
+              </a:ext>
+            </a:extLst>
+          </p:cNvPr>
+          <p:cNvSpPr/>
+          <p:nvPr/>
+        </p:nvSpPr>
+        <p:spPr>
+          <a:xfrm>
+            <a:off x="5907108" y="3065106"/>
+            <a:ext cx="2306280" cy="363894"/>
+          </a:xfrm>
+          <a:prstGeom prst="rect">
+            <a:avLst/>
+          </a:prstGeom>
+          <a:noFill/>
+        </p:spPr>
+        <p:style>
+          <a:lnRef idx="2">
+            <a:schemeClr val="accent1">
+              <a:shade val="15000"/>
+            </a:schemeClr>
+          </a:lnRef>
+          <a:fillRef idx="1">
+            <a:schemeClr val="accent1"/>
+          </a:fillRef>
+          <a:effectRef idx="0">
+            <a:schemeClr val="accent1"/>
+          </a:effectRef>
+          <a:fontRef idx="minor">
+            <a:schemeClr val="lt1"/>
+          </a:fontRef>
+        </p:style>
+        <p:txBody>
+          <a:bodyPr lIns="0" tIns="45720" rIns="0" bIns="0" rtlCol="0" anchor="ctr"/>
+          <a:lstStyle/>
+          <a:p>
+            <a:pPr algn="ctr">
+              <a:lnSpc>
+                <a:spcPts val="1100"/>
+              </a:lnSpc>
+            </a:pPr>
+            <a:r>
+              <a:rPr lang="en-US" sz="1100" b="1" dirty="0">
+                <a:solidFill>
+                  <a:schemeClr val="accent1">
+                    <a:lumMod val="75000"/>
+                  </a:schemeClr>
+                </a:solidFill>
+              </a:rPr>
+              <a:t>Phase 3 (RQ3): </a:t>
+            </a:r>
+            <a:r>
+              <a:rPr lang="en-US" sz="1100" b="1" dirty="0">
+                <a:solidFill>
+                  <a:schemeClr val="tx1"/>
+                </a:solidFill>
+              </a:rPr>
+              <a:t>Interpreter Robustness</a:t>
+            </a:r>
+          </a:p>
+          <a:p>
+            <a:pPr algn="ctr">
+              <a:lnSpc>
+                <a:spcPts val="1100"/>
+              </a:lnSpc>
+            </a:pPr>
+            <a:r>
+              <a:rPr lang="en-US" sz="1100" b="1" dirty="0">
+                <a:solidFill>
+                  <a:schemeClr val="tx1"/>
+                </a:solidFill>
+              </a:rPr>
+              <a:t>Under Adversarial Bytecode</a:t>
+            </a:r>
+          </a:p>
+        </p:txBody>
+      </p:sp>
+      <p:sp>
+        <p:nvSpPr>
+          <p:cNvPr id="47" name="Rectangle: Folded Corner 46">
+            <a:extLst>
+              <a:ext uri="{FF2B5EF4-FFF2-40B4-BE49-F238E27FC236}">
+                <a16:creationId xmlns:a16="http://schemas.microsoft.com/office/drawing/2014/main" id="{E884DA6B-01F8-C43D-E9A5-FF172B574073}"/>
+              </a:ext>
+            </a:extLst>
+          </p:cNvPr>
+          <p:cNvSpPr/>
+          <p:nvPr/>
+        </p:nvSpPr>
+        <p:spPr>
+          <a:xfrm>
+            <a:off x="8494674" y="3065106"/>
+            <a:ext cx="745786" cy="363894"/>
+          </a:xfrm>
+          <a:prstGeom prst="foldedCorner">
+            <a:avLst/>
+          </a:prstGeom>
+          <a:solidFill>
+            <a:schemeClr val="bg1">
+              <a:lumMod val="95000"/>
+            </a:schemeClr>
+          </a:solidFill>
+        </p:spPr>
+        <p:style>
+          <a:lnRef idx="2">
+            <a:schemeClr val="accent1">
+              <a:shade val="15000"/>
+            </a:schemeClr>
+          </a:lnRef>
+          <a:fillRef idx="1">
+            <a:schemeClr val="accent1"/>
+          </a:fillRef>
+          <a:effectRef idx="0">
+            <a:schemeClr val="accent1"/>
+          </a:effectRef>
+          <a:fontRef idx="minor">
+            <a:schemeClr val="lt1"/>
+          </a:fontRef>
+        </p:style>
+        <p:txBody>
+          <a:bodyPr lIns="0" tIns="45720" rIns="0" bIns="0" rtlCol="0" anchor="ctr"/>
+          <a:lstStyle/>
+          <a:p>
+            <a:pPr algn="ctr"/>
+            <a:r>
+              <a:rPr lang="en-US" sz="1100" b="1" dirty="0">
+                <a:solidFill>
+                  <a:schemeClr val="tx1"/>
+                </a:solidFill>
+              </a:rPr>
+              <a:t>Adversarial</a:t>
+            </a:r>
+          </a:p>
+          <a:p>
+            <a:pPr algn="ctr"/>
+            <a:r>
+              <a:rPr lang="en-US" sz="1100" b="1" dirty="0">
+                <a:solidFill>
+                  <a:schemeClr val="tx1"/>
+                </a:solidFill>
+              </a:rPr>
+              <a:t>bytecode</a:t>
+            </a:r>
+            <a:r>
+              <a:rPr lang="en-US" altLang="zh-CN" sz="1100" b="1" dirty="0">
+                <a:solidFill>
+                  <a:schemeClr val="tx1"/>
+                </a:solidFill>
+              </a:rPr>
+              <a:t>s</a:t>
+            </a:r>
+            <a:endParaRPr lang="en-US" sz="1100" b="1" dirty="0">
+              <a:solidFill>
+                <a:schemeClr val="tx1"/>
+              </a:solidFill>
+            </a:endParaRPr>
+          </a:p>
+        </p:txBody>
+      </p:sp>
+      <p:sp>
+        <p:nvSpPr>
+          <p:cNvPr id="48" name="Rectangle 47">
+            <a:extLst>
+              <a:ext uri="{FF2B5EF4-FFF2-40B4-BE49-F238E27FC236}">
+                <a16:creationId xmlns:a16="http://schemas.microsoft.com/office/drawing/2014/main" id="{4D42CC3E-DCD0-9957-E12E-7FC0E974749F}"/>
+              </a:ext>
+            </a:extLst>
+          </p:cNvPr>
+          <p:cNvSpPr/>
+          <p:nvPr/>
+        </p:nvSpPr>
+        <p:spPr>
+          <a:xfrm>
+            <a:off x="9521746" y="3065106"/>
+            <a:ext cx="2172506" cy="363894"/>
+          </a:xfrm>
+          <a:prstGeom prst="rect">
+            <a:avLst/>
+          </a:prstGeom>
+          <a:noFill/>
+        </p:spPr>
+        <p:style>
+          <a:lnRef idx="2">
+            <a:schemeClr val="accent1">
+              <a:shade val="15000"/>
+            </a:schemeClr>
+          </a:lnRef>
+          <a:fillRef idx="1">
+            <a:schemeClr val="accent1"/>
+          </a:fillRef>
+          <a:effectRef idx="0">
+            <a:schemeClr val="accent1"/>
+          </a:effectRef>
+          <a:fontRef idx="minor">
+            <a:schemeClr val="lt1"/>
+          </a:fontRef>
+        </p:style>
+        <p:txBody>
+          <a:bodyPr lIns="0" tIns="45720" rIns="0" bIns="0" rtlCol="0" anchor="ctr"/>
+          <a:lstStyle/>
+          <a:p>
+            <a:pPr algn="ctr">
+              <a:lnSpc>
+                <a:spcPts val="1100"/>
+              </a:lnSpc>
+            </a:pPr>
+            <a:r>
+              <a:rPr lang="en-US" sz="1100" b="1" dirty="0">
+                <a:solidFill>
+                  <a:schemeClr val="accent1">
+                    <a:lumMod val="75000"/>
+                  </a:schemeClr>
+                </a:solidFill>
+              </a:rPr>
+              <a:t>Phase 4 (RQ4): </a:t>
+            </a:r>
+            <a:r>
+              <a:rPr lang="en-US" sz="1100" b="1" dirty="0">
+                <a:solidFill>
+                  <a:schemeClr val="tx1"/>
+                </a:solidFill>
+              </a:rPr>
+              <a:t>Source-Reproduction</a:t>
+            </a:r>
+          </a:p>
+          <a:p>
+            <a:pPr algn="ctr">
+              <a:lnSpc>
+                <a:spcPts val="1100"/>
+              </a:lnSpc>
+            </a:pPr>
+            <a:r>
+              <a:rPr lang="en-US" sz="1100" b="1" dirty="0">
+                <a:solidFill>
+                  <a:schemeClr val="tx1"/>
+                </a:solidFill>
+              </a:rPr>
+              <a:t>Analysis</a:t>
+            </a:r>
+          </a:p>
+        </p:txBody>
+      </p:sp>
+      <p:cxnSp>
+        <p:nvCxnSpPr>
+          <p:cNvPr id="50" name="Straight Arrow Connector 49">
+            <a:extLst>
+              <a:ext uri="{FF2B5EF4-FFF2-40B4-BE49-F238E27FC236}">
+                <a16:creationId xmlns:a16="http://schemas.microsoft.com/office/drawing/2014/main" id="{09C5B246-4C24-18E1-C035-33BE75657357}"/>
+              </a:ext>
+            </a:extLst>
+          </p:cNvPr>
+          <p:cNvCxnSpPr>
+            <a:cxnSpLocks/>
+            <a:stCxn id="35" idx="4"/>
+            <a:endCxn id="36" idx="1"/>
+          </p:cNvCxnSpPr>
+          <p:nvPr/>
+        </p:nvCxnSpPr>
+        <p:spPr>
+          <a:xfrm>
+            <a:off x="2071992" y="2622645"/>
+            <a:ext cx="243191" cy="0"/>
+          </a:xfrm>
+          <a:prstGeom prst="straightConnector1">
+            <a:avLst/>
+          </a:prstGeom>
+          <a:ln>
+            <a:solidFill>
+              <a:schemeClr val="tx1"/>
+            </a:solidFill>
+            <a:tailEnd type="triangle"/>
+          </a:ln>
+        </p:spPr>
+        <p:style>
+          <a:lnRef idx="1">
+            <a:schemeClr val="accent1"/>
+          </a:lnRef>
+          <a:fillRef idx="0">
+            <a:schemeClr val="accent1"/>
+          </a:fillRef>
+          <a:effectRef idx="0">
+            <a:schemeClr val="accent1"/>
+          </a:effectRef>
+          <a:fontRef idx="minor">
+            <a:schemeClr val="tx1"/>
+          </a:fontRef>
+        </p:style>
+      </p:cxnSp>
+      <p:cxnSp>
+        <p:nvCxnSpPr>
+          <p:cNvPr id="53" name="Straight Arrow Connector 52">
+            <a:extLst>
+              <a:ext uri="{FF2B5EF4-FFF2-40B4-BE49-F238E27FC236}">
+                <a16:creationId xmlns:a16="http://schemas.microsoft.com/office/drawing/2014/main" id="{09E6DEFB-C4A6-57C9-C5FD-3DA9D4ACB01F}"/>
+              </a:ext>
+            </a:extLst>
+          </p:cNvPr>
+          <p:cNvCxnSpPr>
+            <a:stCxn id="41" idx="3"/>
+            <a:endCxn id="42" idx="1"/>
+          </p:cNvCxnSpPr>
+          <p:nvPr/>
+        </p:nvCxnSpPr>
+        <p:spPr>
+          <a:xfrm>
+            <a:off x="4143979" y="2622645"/>
+            <a:ext cx="282100" cy="0"/>
+          </a:xfrm>
+          <a:prstGeom prst="straightConnector1">
+            <a:avLst/>
+          </a:prstGeom>
+          <a:ln>
+            <a:solidFill>
+              <a:schemeClr val="tx1"/>
+            </a:solidFill>
+            <a:tailEnd type="triangle"/>
+          </a:ln>
+        </p:spPr>
+        <p:style>
+          <a:lnRef idx="1">
+            <a:schemeClr val="accent1"/>
+          </a:lnRef>
+          <a:fillRef idx="0">
+            <a:schemeClr val="accent1"/>
+          </a:fillRef>
+          <a:effectRef idx="0">
+            <a:schemeClr val="accent1"/>
+          </a:effectRef>
+          <a:fontRef idx="minor">
+            <a:schemeClr val="tx1"/>
+          </a:fontRef>
+        </p:style>
+      </p:cxnSp>
+      <p:cxnSp>
+        <p:nvCxnSpPr>
+          <p:cNvPr id="55" name="Straight Arrow Connector 54">
+            <a:extLst>
+              <a:ext uri="{FF2B5EF4-FFF2-40B4-BE49-F238E27FC236}">
+                <a16:creationId xmlns:a16="http://schemas.microsoft.com/office/drawing/2014/main" id="{D6586230-FAED-2DE7-BD24-EB9B9A57EC1A}"/>
+              </a:ext>
+            </a:extLst>
+          </p:cNvPr>
+          <p:cNvCxnSpPr>
+            <a:stCxn id="36" idx="3"/>
+            <a:endCxn id="41" idx="1"/>
+          </p:cNvCxnSpPr>
+          <p:nvPr/>
+        </p:nvCxnSpPr>
+        <p:spPr>
+          <a:xfrm>
+            <a:off x="3258765" y="2622645"/>
+            <a:ext cx="282100" cy="0"/>
+          </a:xfrm>
+          <a:prstGeom prst="straightConnector1">
+            <a:avLst/>
+          </a:prstGeom>
+          <a:ln>
+            <a:solidFill>
+              <a:schemeClr val="tx1"/>
+            </a:solidFill>
+            <a:tailEnd type="triangle"/>
+          </a:ln>
+        </p:spPr>
+        <p:style>
+          <a:lnRef idx="1">
+            <a:schemeClr val="accent1"/>
+          </a:lnRef>
+          <a:fillRef idx="0">
+            <a:schemeClr val="accent1"/>
+          </a:fillRef>
+          <a:effectRef idx="0">
+            <a:schemeClr val="accent1"/>
+          </a:effectRef>
+          <a:fontRef idx="minor">
+            <a:schemeClr val="tx1"/>
+          </a:fontRef>
+        </p:style>
+      </p:cxnSp>
+      <p:cxnSp>
+        <p:nvCxnSpPr>
+          <p:cNvPr id="60" name="Straight Arrow Connector 59">
+            <a:extLst>
+              <a:ext uri="{FF2B5EF4-FFF2-40B4-BE49-F238E27FC236}">
+                <a16:creationId xmlns:a16="http://schemas.microsoft.com/office/drawing/2014/main" id="{489AB159-968C-4747-F9A0-BACE443871E9}"/>
+              </a:ext>
+            </a:extLst>
+          </p:cNvPr>
+          <p:cNvCxnSpPr>
+            <a:stCxn id="42" idx="3"/>
+            <a:endCxn id="43" idx="1"/>
+          </p:cNvCxnSpPr>
+          <p:nvPr/>
+        </p:nvCxnSpPr>
+        <p:spPr>
+          <a:xfrm>
+            <a:off x="6079779" y="2622645"/>
+            <a:ext cx="282100" cy="24"/>
+          </a:xfrm>
+          <a:prstGeom prst="straightConnector1">
+            <a:avLst/>
+          </a:prstGeom>
+          <a:ln>
+            <a:solidFill>
+              <a:schemeClr val="tx1"/>
+            </a:solidFill>
+            <a:tailEnd type="triangle"/>
+          </a:ln>
+        </p:spPr>
+        <p:style>
+          <a:lnRef idx="1">
+            <a:schemeClr val="accent1"/>
+          </a:lnRef>
+          <a:fillRef idx="0">
+            <a:schemeClr val="accent1"/>
+          </a:fillRef>
+          <a:effectRef idx="0">
+            <a:schemeClr val="accent1"/>
+          </a:effectRef>
+          <a:fontRef idx="minor">
+            <a:schemeClr val="tx1"/>
+          </a:fontRef>
+        </p:style>
+      </p:cxnSp>
+      <p:cxnSp>
+        <p:nvCxnSpPr>
+          <p:cNvPr id="62" name="Straight Arrow Connector 61">
+            <a:extLst>
+              <a:ext uri="{FF2B5EF4-FFF2-40B4-BE49-F238E27FC236}">
+                <a16:creationId xmlns:a16="http://schemas.microsoft.com/office/drawing/2014/main" id="{6F023349-F811-4024-95B9-D290DF3B48AD}"/>
+              </a:ext>
+            </a:extLst>
+          </p:cNvPr>
+          <p:cNvCxnSpPr>
+            <a:cxnSpLocks/>
+            <a:stCxn id="43" idx="3"/>
+            <a:endCxn id="45" idx="1"/>
+          </p:cNvCxnSpPr>
+          <p:nvPr/>
+        </p:nvCxnSpPr>
+        <p:spPr>
+          <a:xfrm flipV="1">
+            <a:off x="7230882" y="2622645"/>
+            <a:ext cx="297519" cy="24"/>
+          </a:xfrm>
+          <a:prstGeom prst="straightConnector1">
+            <a:avLst/>
+          </a:prstGeom>
+          <a:ln>
+            <a:solidFill>
+              <a:schemeClr val="tx1"/>
+            </a:solidFill>
+            <a:tailEnd type="triangle"/>
+          </a:ln>
+        </p:spPr>
+        <p:style>
+          <a:lnRef idx="1">
+            <a:schemeClr val="accent1"/>
+          </a:lnRef>
+          <a:fillRef idx="0">
+            <a:schemeClr val="accent1"/>
+          </a:fillRef>
+          <a:effectRef idx="0">
+            <a:schemeClr val="accent1"/>
+          </a:effectRef>
+          <a:fontRef idx="minor">
+            <a:schemeClr val="tx1"/>
+          </a:fontRef>
+        </p:style>
+      </p:cxnSp>
+      <p:cxnSp>
+        <p:nvCxnSpPr>
+          <p:cNvPr id="68" name="Straight Arrow Connector 67">
+            <a:extLst>
+              <a:ext uri="{FF2B5EF4-FFF2-40B4-BE49-F238E27FC236}">
+                <a16:creationId xmlns:a16="http://schemas.microsoft.com/office/drawing/2014/main" id="{BB364682-689A-2FFF-0409-CEB6286D5FC1}"/>
+              </a:ext>
+            </a:extLst>
+          </p:cNvPr>
+          <p:cNvCxnSpPr>
+            <a:cxnSpLocks/>
+            <a:stCxn id="44" idx="3"/>
+            <a:endCxn id="46" idx="1"/>
+          </p:cNvCxnSpPr>
+          <p:nvPr/>
+        </p:nvCxnSpPr>
+        <p:spPr>
+          <a:xfrm>
+            <a:off x="5625822" y="3247053"/>
+            <a:ext cx="281286" cy="0"/>
+          </a:xfrm>
+          <a:prstGeom prst="straightConnector1">
+            <a:avLst/>
+          </a:prstGeom>
+          <a:ln>
+            <a:solidFill>
+              <a:schemeClr val="tx1"/>
+            </a:solidFill>
+            <a:tailEnd type="triangle"/>
+          </a:ln>
+        </p:spPr>
+        <p:style>
+          <a:lnRef idx="1">
+            <a:schemeClr val="accent1"/>
+          </a:lnRef>
+          <a:fillRef idx="0">
+            <a:schemeClr val="accent1"/>
+          </a:fillRef>
+          <a:effectRef idx="0">
+            <a:schemeClr val="accent1"/>
+          </a:effectRef>
+          <a:fontRef idx="minor">
+            <a:schemeClr val="tx1"/>
+          </a:fontRef>
+        </p:style>
+      </p:cxnSp>
+      <p:cxnSp>
+        <p:nvCxnSpPr>
+          <p:cNvPr id="74" name="Straight Arrow Connector 73">
+            <a:extLst>
+              <a:ext uri="{FF2B5EF4-FFF2-40B4-BE49-F238E27FC236}">
+                <a16:creationId xmlns:a16="http://schemas.microsoft.com/office/drawing/2014/main" id="{10154382-358E-4FD9-DDD6-0A05BDD4BC60}"/>
+              </a:ext>
+            </a:extLst>
+          </p:cNvPr>
+          <p:cNvCxnSpPr>
+            <a:cxnSpLocks/>
+            <a:stCxn id="46" idx="3"/>
+            <a:endCxn id="47" idx="1"/>
+          </p:cNvCxnSpPr>
+          <p:nvPr/>
+        </p:nvCxnSpPr>
+        <p:spPr>
+          <a:xfrm>
+            <a:off x="8213388" y="3247053"/>
+            <a:ext cx="281286" cy="0"/>
+          </a:xfrm>
+          <a:prstGeom prst="straightConnector1">
+            <a:avLst/>
+          </a:prstGeom>
+          <a:ln>
+            <a:solidFill>
+              <a:schemeClr val="tx1"/>
+            </a:solidFill>
+            <a:tailEnd type="triangle"/>
+          </a:ln>
+        </p:spPr>
+        <p:style>
+          <a:lnRef idx="1">
+            <a:schemeClr val="accent1"/>
+          </a:lnRef>
+          <a:fillRef idx="0">
+            <a:schemeClr val="accent1"/>
+          </a:fillRef>
+          <a:effectRef idx="0">
+            <a:schemeClr val="accent1"/>
+          </a:effectRef>
+          <a:fontRef idx="minor">
+            <a:schemeClr val="tx1"/>
+          </a:fontRef>
+        </p:style>
+      </p:cxnSp>
+      <p:cxnSp>
+        <p:nvCxnSpPr>
+          <p:cNvPr id="77" name="Straight Arrow Connector 76">
+            <a:extLst>
+              <a:ext uri="{FF2B5EF4-FFF2-40B4-BE49-F238E27FC236}">
+                <a16:creationId xmlns:a16="http://schemas.microsoft.com/office/drawing/2014/main" id="{94D4E979-AFC3-A185-9196-62B5CA0D2383}"/>
+              </a:ext>
+            </a:extLst>
+          </p:cNvPr>
+          <p:cNvCxnSpPr>
+            <a:cxnSpLocks/>
+            <a:stCxn id="47" idx="3"/>
+            <a:endCxn id="48" idx="1"/>
+          </p:cNvCxnSpPr>
+          <p:nvPr/>
+        </p:nvCxnSpPr>
+        <p:spPr>
+          <a:xfrm>
+            <a:off x="9240460" y="3247053"/>
+            <a:ext cx="281286" cy="0"/>
+          </a:xfrm>
+          <a:prstGeom prst="straightConnector1">
+            <a:avLst/>
+          </a:prstGeom>
+          <a:ln>
+            <a:solidFill>
+              <a:schemeClr val="tx1"/>
+            </a:solidFill>
+            <a:tailEnd type="triangle"/>
+          </a:ln>
+        </p:spPr>
+        <p:style>
+          <a:lnRef idx="1">
+            <a:schemeClr val="accent1"/>
+          </a:lnRef>
+          <a:fillRef idx="0">
+            <a:schemeClr val="accent1"/>
+          </a:fillRef>
+          <a:effectRef idx="0">
+            <a:schemeClr val="accent1"/>
+          </a:effectRef>
+          <a:fontRef idx="minor">
+            <a:schemeClr val="tx1"/>
+          </a:fontRef>
+        </p:style>
+      </p:cxnSp>
+      <p:cxnSp>
+        <p:nvCxnSpPr>
+          <p:cNvPr id="101" name="Straight Arrow Connector 100">
+            <a:extLst>
+              <a:ext uri="{FF2B5EF4-FFF2-40B4-BE49-F238E27FC236}">
+                <a16:creationId xmlns:a16="http://schemas.microsoft.com/office/drawing/2014/main" id="{5CDD0DA9-1EF2-581A-C770-E069AB6B2239}"/>
+              </a:ext>
+            </a:extLst>
+          </p:cNvPr>
+          <p:cNvCxnSpPr>
+            <a:stCxn id="42" idx="2"/>
+            <a:endCxn id="44" idx="0"/>
+          </p:cNvCxnSpPr>
+          <p:nvPr/>
+        </p:nvCxnSpPr>
+        <p:spPr>
+          <a:xfrm>
+            <a:off x="5252929" y="2804592"/>
+            <a:ext cx="0" cy="260514"/>
+          </a:xfrm>
+          <a:prstGeom prst="straightConnector1">
+            <a:avLst/>
+          </a:prstGeom>
+          <a:ln>
+            <a:solidFill>
+              <a:schemeClr val="tx1"/>
+            </a:solidFill>
+            <a:tailEnd type="triangle"/>
+          </a:ln>
+        </p:spPr>
+        <p:style>
+          <a:lnRef idx="1">
+            <a:schemeClr val="accent1"/>
+          </a:lnRef>
+          <a:fillRef idx="0">
+            <a:schemeClr val="accent1"/>
+          </a:fillRef>
+          <a:effectRef idx="0">
+            <a:schemeClr val="accent1"/>
+          </a:effectRef>
+          <a:fontRef idx="minor">
+            <a:schemeClr val="tx1"/>
+          </a:fontRef>
+        </p:style>
+      </p:cxnSp>
+    </p:spTree>
+    <p:extLst>
+      <p:ext uri="{BB962C8B-B14F-4D97-AF65-F5344CB8AC3E}">
+        <p14:creationId xmlns:p14="http://schemas.microsoft.com/office/powerpoint/2010/main" val="94263403"/>
+      </p:ext>
+    </p:extLst>
+  </p:cSld>
+  <p:clrMapOvr>
+    <a:masterClrMapping/>
+  </p:clrMapOvr>
+</p:sld>
+</file>
+
+<file path=ppt/slides/slide4.xml><?xml version="1.0" encoding="utf-8"?>
+<p:sld xmlns:a="http://schemas.openxmlformats.org/drawingml/2006/main" xmlns:r="http://schemas.openxmlformats.org/officeDocument/2006/relationships" xmlns:p="http://schemas.openxmlformats.org/presentationml/2006/main">
+  <p:cSld>
+    <p:spTree>
+      <p:nvGrpSpPr>
         <p:cNvPr id="1" name=""/>
         <p:cNvGrpSpPr/>
         <p:nvPr/>
@@ -8355,7 +9655,7 @@
 </p:sld>
 </file>
 
-<file path=ppt/slides/slide4.xml><?xml version="1.0" encoding="utf-8"?>
+<file path=ppt/slides/slide5.xml><?xml version="1.0" encoding="utf-8"?>
 <p:sld xmlns:a="http://schemas.openxmlformats.org/drawingml/2006/main" xmlns:r="http://schemas.openxmlformats.org/officeDocument/2006/relationships" xmlns:p="http://schemas.openxmlformats.org/presentationml/2006/main">
   <p:cSld>
     <p:spTree>
@@ -8392,17 +9692,16 @@
         </p:nvSpPr>
         <p:spPr>
           <a:xfrm>
-            <a:off x="2583180" y="2186940"/>
-            <a:ext cx="5067300" cy="899160"/>
+            <a:off x="2556588" y="2402732"/>
+            <a:ext cx="4940325" cy="612842"/>
           </a:xfrm>
           <a:prstGeom prst="rect">
             <a:avLst/>
           </a:prstGeom>
-          <a:solidFill>
-            <a:schemeClr val="bg1">
-              <a:lumMod val="95000"/>
-            </a:schemeClr>
-          </a:solidFill>
+          <a:noFill/>
+          <a:ln>
+            <a:prstDash val="dash"/>
+          </a:ln>
         </p:spPr>
         <p:style>
           <a:lnRef idx="2">
@@ -8440,14 +9739,15 @@
           </p:cNvPr>
           <p:cNvCxnSpPr>
             <a:cxnSpLocks/>
+            <a:stCxn id="50" idx="3"/>
             <a:endCxn id="29" idx="1"/>
           </p:cNvCxnSpPr>
           <p:nvPr/>
         </p:nvCxnSpPr>
         <p:spPr>
           <a:xfrm>
-            <a:off x="2426971" y="2700020"/>
-            <a:ext cx="240029" cy="0"/>
+            <a:off x="2430781" y="2700020"/>
+            <a:ext cx="255271" cy="0"/>
           </a:xfrm>
           <a:prstGeom prst="straightConnector1">
             <a:avLst/>
@@ -8488,8 +9788,8 @@
         </p:nvSpPr>
         <p:spPr>
           <a:xfrm>
-            <a:off x="2667000" y="2442210"/>
-            <a:ext cx="1432559" cy="515620"/>
+            <a:off x="2686052" y="2513395"/>
+            <a:ext cx="1432559" cy="373250"/>
           </a:xfrm>
           <a:prstGeom prst="rect">
             <a:avLst/>
@@ -8513,63 +9813,81 @@
           </a:fontRef>
         </p:style>
         <p:txBody>
-          <a:bodyPr lIns="0" tIns="0" rIns="0" bIns="0" rtlCol="0" anchor="ctr"/>
-          <a:lstStyle/>
-          <a:p>
-            <a:pPr algn="ctr"/>
-            <a:r>
-              <a:rPr lang="en-US" sz="1100" dirty="0">
-                <a:solidFill>
-                  <a:srgbClr val="000000"/>
-                </a:solidFill>
-                <a:cs typeface="Arial" panose="020B0604020202020204" pitchFamily="34" charset="-120"/>
+          <a:bodyPr lIns="0" tIns="45720" rIns="0" bIns="0" rtlCol="0" anchor="ctr"/>
+          <a:lstStyle/>
+          <a:p>
+            <a:pPr algn="ctr">
+              <a:lnSpc>
+                <a:spcPts val="1100"/>
+              </a:lnSpc>
+            </a:pPr>
+            <a:r>
+              <a:rPr lang="en-US" sz="1100" b="1" dirty="0">
+                <a:solidFill>
+                  <a:schemeClr val="tx1"/>
+                </a:solidFill>
               </a:rPr>
               <a:t>Extract seeds</a:t>
             </a:r>
           </a:p>
           <a:p>
-            <a:pPr algn="ctr"/>
-            <a:r>
-              <a:rPr lang="en-US" sz="1100" dirty="0">
-                <a:solidFill>
-                  <a:srgbClr val="000000"/>
-                </a:solidFill>
-                <a:cs typeface="Arial" panose="020B0604020202020204" pitchFamily="34" charset="-120"/>
+            <a:pPr algn="ctr">
+              <a:lnSpc>
+                <a:spcPts val="1100"/>
+              </a:lnSpc>
+            </a:pPr>
+            <a:r>
+              <a:rPr lang="en-US" sz="1100" b="1" dirty="0">
+                <a:solidFill>
+                  <a:schemeClr val="tx1"/>
+                </a:solidFill>
               </a:rPr>
               <a:t>from </a:t>
             </a:r>
             <a:r>
-              <a:rPr lang="en-US" sz="1100" dirty="0" err="1">
-                <a:solidFill>
-                  <a:srgbClr val="000000"/>
-                </a:solidFill>
-                <a:cs typeface="Arial" panose="020B0604020202020204" pitchFamily="34" charset="-120"/>
-              </a:rPr>
-              <a:t>Cpython</a:t>
-            </a:r>
-            <a:r>
-              <a:rPr lang="en-US" sz="1100" dirty="0">
-                <a:solidFill>
-                  <a:srgbClr val="000000"/>
-                </a:solidFill>
-                <a:cs typeface="Arial" panose="020B0604020202020204" pitchFamily="34" charset="-120"/>
+              <a:rPr lang="en-US" sz="1100" b="1" dirty="0" err="1">
+                <a:solidFill>
+                  <a:schemeClr val="tx1"/>
+                </a:solidFill>
+              </a:rPr>
+              <a:t>C</a:t>
+            </a:r>
+            <a:r>
+              <a:rPr lang="en-US" altLang="zh-CN" sz="1100" b="1" dirty="0" err="1">
+                <a:solidFill>
+                  <a:schemeClr val="tx1"/>
+                </a:solidFill>
+              </a:rPr>
+              <a:t>P</a:t>
+            </a:r>
+            <a:r>
+              <a:rPr lang="en-US" sz="1100" b="1" dirty="0" err="1">
+                <a:solidFill>
+                  <a:schemeClr val="tx1"/>
+                </a:solidFill>
+              </a:rPr>
+              <a:t>ython</a:t>
+            </a:r>
+            <a:r>
+              <a:rPr lang="en-US" sz="1100" b="1" dirty="0">
+                <a:solidFill>
+                  <a:schemeClr val="tx1"/>
+                </a:solidFill>
               </a:rPr>
               <a:t> </a:t>
             </a:r>
             <a:r>
-              <a:rPr lang="en-US" sz="1100" dirty="0" err="1">
-                <a:solidFill>
-                  <a:srgbClr val="000000"/>
-                </a:solidFill>
-                <a:cs typeface="Arial" panose="020B0604020202020204" pitchFamily="34" charset="-120"/>
+              <a:rPr lang="en-US" sz="1100" b="1" dirty="0" err="1">
+                <a:solidFill>
+                  <a:schemeClr val="tx1"/>
+                </a:solidFill>
               </a:rPr>
               <a:t>unittests</a:t>
             </a:r>
-            <a:endParaRPr lang="en-US" sz="1100" dirty="0">
+            <a:endParaRPr lang="en-US" sz="1100" b="1" dirty="0">
               <a:solidFill>
-                <a:srgbClr val="000000"/>
+                <a:schemeClr val="tx1"/>
               </a:solidFill>
-              <a:cs typeface="Arial" panose="020B0604020202020204" pitchFamily="34" charset="-120"/>
             </a:endParaRPr>
           </a:p>
         </p:txBody>
@@ -8588,8 +9906,8 @@
         </p:nvSpPr>
         <p:spPr>
           <a:xfrm>
-            <a:off x="4339588" y="2442210"/>
-            <a:ext cx="1539241" cy="515620"/>
+            <a:off x="4339588" y="2513395"/>
+            <a:ext cx="1539241" cy="373250"/>
           </a:xfrm>
           <a:prstGeom prst="rect">
             <a:avLst/>
@@ -8613,34 +9931,35 @@
           </a:fontRef>
         </p:style>
         <p:txBody>
-          <a:bodyPr lIns="0" tIns="0" rIns="0" bIns="0" rtlCol="0" anchor="ctr"/>
-          <a:lstStyle/>
-          <a:p>
-            <a:pPr algn="ctr"/>
-            <a:r>
-              <a:rPr lang="en-US" sz="1100" dirty="0">
-                <a:solidFill>
-                  <a:srgbClr val="000000"/>
-                </a:solidFill>
-                <a:cs typeface="Arial" panose="020B0604020202020204" pitchFamily="34" charset="-120"/>
+          <a:bodyPr lIns="0" tIns="45720" rIns="0" bIns="0" rtlCol="0" anchor="ctr"/>
+          <a:lstStyle/>
+          <a:p>
+            <a:pPr algn="ctr">
+              <a:lnSpc>
+                <a:spcPts val="1100"/>
+              </a:lnSpc>
+            </a:pPr>
+            <a:r>
+              <a:rPr lang="en-US" sz="1100" b="1" dirty="0">
+                <a:solidFill>
+                  <a:schemeClr val="tx1"/>
+                </a:solidFill>
               </a:rPr>
               <a:t>Compile seeds to version-matched .</a:t>
             </a:r>
             <a:r>
-              <a:rPr lang="en-US" sz="1100" dirty="0" err="1">
-                <a:solidFill>
-                  <a:srgbClr val="000000"/>
-                </a:solidFill>
-                <a:cs typeface="Arial" panose="020B0604020202020204" pitchFamily="34" charset="-120"/>
+              <a:rPr lang="en-US" sz="1100" b="1" dirty="0" err="1">
+                <a:solidFill>
+                  <a:schemeClr val="tx1"/>
+                </a:solidFill>
               </a:rPr>
               <a:t>pyc</a:t>
             </a:r>
             <a:r>
-              <a:rPr lang="en-US" sz="1100" dirty="0">
-                <a:solidFill>
-                  <a:srgbClr val="000000"/>
-                </a:solidFill>
-                <a:cs typeface="Arial" panose="020B0604020202020204" pitchFamily="34" charset="-120"/>
+              <a:rPr lang="en-US" sz="1100" b="1" dirty="0">
+                <a:solidFill>
+                  <a:schemeClr val="tx1"/>
+                </a:solidFill>
               </a:rPr>
               <a:t> corpus</a:t>
             </a:r>
@@ -8665,8 +9984,8 @@
         </p:nvCxnSpPr>
         <p:spPr>
           <a:xfrm>
-            <a:off x="4099559" y="2700020"/>
-            <a:ext cx="240029" cy="0"/>
+            <a:off x="4118611" y="2700020"/>
+            <a:ext cx="220977" cy="0"/>
           </a:xfrm>
           <a:prstGeom prst="straightConnector1">
             <a:avLst/>
@@ -8707,8 +10026,8 @@
         </p:nvSpPr>
         <p:spPr>
           <a:xfrm>
-            <a:off x="6134100" y="2442210"/>
-            <a:ext cx="1436372" cy="515620"/>
+            <a:off x="6134100" y="2513395"/>
+            <a:ext cx="1227753" cy="373250"/>
           </a:xfrm>
           <a:prstGeom prst="rect">
             <a:avLst/>
@@ -8732,58 +10051,52 @@
           </a:fontRef>
         </p:style>
         <p:txBody>
-          <a:bodyPr lIns="0" tIns="0" rIns="0" bIns="0" rtlCol="0" anchor="ctr"/>
-          <a:lstStyle/>
-          <a:p>
-            <a:pPr algn="ctr"/>
-            <a:r>
-              <a:rPr lang="en-US" sz="1100" dirty="0">
-                <a:solidFill>
-                  <a:srgbClr val="000000"/>
-                </a:solidFill>
-                <a:cs typeface="Arial" panose="020B0604020202020204" pitchFamily="34" charset="-120"/>
+          <a:bodyPr lIns="0" tIns="45720" rIns="0" bIns="0" rtlCol="0" anchor="ctr"/>
+          <a:lstStyle/>
+          <a:p>
+            <a:pPr algn="ctr">
+              <a:lnSpc>
+                <a:spcPts val="1100"/>
+              </a:lnSpc>
+            </a:pPr>
+            <a:r>
+              <a:rPr lang="en-US" sz="1100" b="1" dirty="0">
+                <a:solidFill>
+                  <a:schemeClr val="tx1"/>
+                </a:solidFill>
               </a:rPr>
               <a:t>Fuzz </a:t>
             </a:r>
             <a:r>
-              <a:rPr lang="en-US" sz="1100" dirty="0" err="1">
-                <a:solidFill>
-                  <a:srgbClr val="000000"/>
-                </a:solidFill>
-                <a:cs typeface="Arial" panose="020B0604020202020204" pitchFamily="34" charset="-120"/>
+              <a:rPr lang="en-US" sz="1100" b="1" dirty="0" err="1">
+                <a:solidFill>
+                  <a:schemeClr val="tx1"/>
+                </a:solidFill>
               </a:rPr>
               <a:t>CPython</a:t>
             </a:r>
             <a:r>
-              <a:rPr lang="en-US" sz="1100" dirty="0">
-                <a:solidFill>
-                  <a:srgbClr val="000000"/>
-                </a:solidFill>
-                <a:cs typeface="Arial" panose="020B0604020202020204" pitchFamily="34" charset="-120"/>
+              <a:rPr lang="en-US" sz="1100" b="1" dirty="0">
+                <a:solidFill>
+                  <a:schemeClr val="tx1"/>
+                </a:solidFill>
               </a:rPr>
               <a:t> with </a:t>
             </a:r>
           </a:p>
           <a:p>
-            <a:pPr algn="ctr"/>
-            <a:r>
-              <a:rPr lang="en-US" sz="1100" dirty="0">
-                <a:solidFill>
-                  <a:srgbClr val="000000"/>
-                </a:solidFill>
-                <a:ea typeface="Arial" panose="020B0604020202020204" pitchFamily="34" charset="-122"/>
-                <a:cs typeface="Arial" panose="020B0604020202020204" pitchFamily="34" charset="-120"/>
-              </a:rPr>
-              <a:t>mutated bytecode</a:t>
-            </a:r>
-            <a:r>
-              <a:rPr lang="en-US" sz="1100" dirty="0">
-                <a:solidFill>
-                  <a:srgbClr val="000000"/>
-                </a:solidFill>
-                <a:cs typeface="Arial" panose="020B0604020202020204" pitchFamily="34" charset="-120"/>
-              </a:rPr>
-              <a:t> </a:t>
+            <a:pPr algn="ctr">
+              <a:lnSpc>
+                <a:spcPts val="1100"/>
+              </a:lnSpc>
+            </a:pPr>
+            <a:r>
+              <a:rPr lang="en-US" sz="1100" b="1" dirty="0">
+                <a:solidFill>
+                  <a:schemeClr val="tx1"/>
+                </a:solidFill>
+              </a:rPr>
+              <a:t>mutated bytecode </a:t>
             </a:r>
           </a:p>
         </p:txBody>
@@ -8848,13 +10161,17 @@
         </p:nvSpPr>
         <p:spPr>
           <a:xfrm>
-            <a:off x="1470661" y="2501900"/>
-            <a:ext cx="960120" cy="396240"/>
+            <a:off x="1470661" y="2513395"/>
+            <a:ext cx="960120" cy="373250"/>
           </a:xfrm>
           <a:prstGeom prst="foldedCorner">
             <a:avLst/>
           </a:prstGeom>
-          <a:noFill/>
+          <a:solidFill>
+            <a:schemeClr val="bg1">
+              <a:lumMod val="95000"/>
+            </a:schemeClr>
+          </a:solidFill>
         </p:spPr>
         <p:style>
           <a:lnRef idx="2">
@@ -8873,12 +10190,16 @@
           </a:fontRef>
         </p:style>
         <p:txBody>
-          <a:bodyPr lIns="0" tIns="0" rIns="0" bIns="0" rtlCol="0" anchor="ctr"/>
-          <a:lstStyle/>
-          <a:p>
-            <a:pPr algn="ctr"/>
-            <a:r>
-              <a:rPr lang="en-US" sz="1100" dirty="0">
+          <a:bodyPr lIns="0" tIns="91440" rIns="0" bIns="0" rtlCol="0" anchor="ctr"/>
+          <a:lstStyle/>
+          <a:p>
+            <a:pPr algn="ctr">
+              <a:lnSpc>
+                <a:spcPts val="1100"/>
+              </a:lnSpc>
+            </a:pPr>
+            <a:r>
+              <a:rPr lang="en-US" sz="1100" b="1" dirty="0">
                 <a:solidFill>
                   <a:schemeClr val="tx1"/>
                 </a:solidFill>
@@ -8886,23 +10207,27 @@
               <a:t>Set of </a:t>
             </a:r>
             <a:r>
-              <a:rPr lang="en-US" sz="1100" dirty="0" err="1">
+              <a:rPr lang="en-US" sz="1100" b="1" dirty="0" err="1">
                 <a:solidFill>
                   <a:schemeClr val="tx1"/>
                 </a:solidFill>
               </a:rPr>
               <a:t>CPython</a:t>
             </a:r>
-            <a:endParaRPr lang="en-US" sz="1100" dirty="0">
+            <a:endParaRPr lang="en-US" sz="1100" b="1" dirty="0">
               <a:solidFill>
                 <a:schemeClr val="tx1"/>
               </a:solidFill>
             </a:endParaRPr>
           </a:p>
           <a:p>
-            <a:pPr algn="ctr"/>
-            <a:r>
-              <a:rPr lang="en-US" sz="1100" dirty="0">
+            <a:pPr algn="ctr">
+              <a:lnSpc>
+                <a:spcPts val="1100"/>
+              </a:lnSpc>
+            </a:pPr>
+            <a:r>
+              <a:rPr lang="en-US" sz="1100" b="1" dirty="0">
                 <a:solidFill>
                   <a:schemeClr val="tx1"/>
                 </a:solidFill>
@@ -8926,13 +10251,17 @@
         </p:nvSpPr>
         <p:spPr>
           <a:xfrm>
-            <a:off x="7833363" y="2476500"/>
-            <a:ext cx="1379216" cy="447040"/>
+            <a:off x="7626377" y="2476500"/>
+            <a:ext cx="1441266" cy="447040"/>
           </a:xfrm>
           <a:prstGeom prst="foldedCorner">
             <a:avLst/>
           </a:prstGeom>
-          <a:noFill/>
+          <a:solidFill>
+            <a:schemeClr val="bg1">
+              <a:lumMod val="95000"/>
+            </a:schemeClr>
+          </a:solidFill>
         </p:spPr>
         <p:style>
           <a:lnRef idx="2">
@@ -8951,33 +10280,37 @@
           </a:fontRef>
         </p:style>
         <p:txBody>
-          <a:bodyPr lIns="0" tIns="0" rIns="0" bIns="0" rtlCol="0" anchor="ctr"/>
-          <a:lstStyle/>
-          <a:p>
-            <a:r>
-              <a:rPr lang="en-US" sz="1100" dirty="0">
-                <a:solidFill>
-                  <a:srgbClr val="000000"/>
-                </a:solidFill>
-                <a:ea typeface="Arial" panose="020B0604020202020204" pitchFamily="34" charset="-122"/>
-                <a:cs typeface="Arial" panose="020B0604020202020204" pitchFamily="34" charset="-120"/>
+          <a:bodyPr lIns="0" tIns="91440" rIns="0" bIns="0" rtlCol="0" anchor="ctr"/>
+          <a:lstStyle/>
+          <a:p>
+            <a:pPr>
+              <a:lnSpc>
+                <a:spcPts val="1100"/>
+              </a:lnSpc>
+            </a:pPr>
+            <a:r>
+              <a:rPr lang="en-US" sz="1100" b="1" dirty="0">
+                <a:solidFill>
+                  <a:schemeClr val="tx1"/>
+                </a:solidFill>
               </a:rPr>
               <a:t> -normal execution</a:t>
             </a:r>
-            <a:endParaRPr lang="en-US" sz="1100" dirty="0"/>
-          </a:p>
-          <a:p>
-            <a:r>
-              <a:rPr lang="en-US" sz="1100" dirty="0">
-                <a:solidFill>
-                  <a:srgbClr val="000000"/>
-                </a:solidFill>
-                <a:ea typeface="Arial" panose="020B0604020202020204" pitchFamily="34" charset="-122"/>
-                <a:cs typeface="Arial" panose="020B0604020202020204" pitchFamily="34" charset="-120"/>
+          </a:p>
+          <a:p>
+            <a:pPr>
+              <a:lnSpc>
+                <a:spcPts val="1100"/>
+              </a:lnSpc>
+            </a:pPr>
+            <a:r>
+              <a:rPr lang="en-US" sz="1100" b="1" dirty="0">
+                <a:solidFill>
+                  <a:schemeClr val="tx1"/>
+                </a:solidFill>
               </a:rPr>
               <a:t> -timeout/ crash / abort</a:t>
             </a:r>
-            <a:endParaRPr lang="en-US" sz="1100" dirty="0"/>
           </a:p>
         </p:txBody>
       </p:sp>
@@ -8991,6 +10324,7 @@
             </a:extLst>
           </p:cNvPr>
           <p:cNvCxnSpPr>
+            <a:cxnSpLocks/>
             <a:stCxn id="39" idx="3"/>
             <a:endCxn id="51" idx="1"/>
           </p:cNvCxnSpPr>
@@ -8998,8 +10332,8 @@
         </p:nvCxnSpPr>
         <p:spPr>
           <a:xfrm>
-            <a:off x="7570472" y="2700020"/>
-            <a:ext cx="262891" cy="0"/>
+            <a:off x="7361853" y="2700020"/>
+            <a:ext cx="264524" cy="0"/>
           </a:xfrm>
           <a:prstGeom prst="straightConnector1">
             <a:avLst/>
@@ -9040,8 +10374,8 @@
         </p:nvSpPr>
         <p:spPr>
           <a:xfrm>
-            <a:off x="2792730" y="2184401"/>
-            <a:ext cx="4648200" cy="213360"/>
+            <a:off x="3594723" y="2146721"/>
+            <a:ext cx="3153253" cy="254163"/>
           </a:xfrm>
           <a:prstGeom prst="rect">
             <a:avLst/>
@@ -9056,7 +10390,7 @@
           <a:p>
             <a:pPr algn="ctr"/>
             <a:r>
-              <a:rPr lang="en-US" sz="1100" dirty="0">
+              <a:rPr lang="en-US" sz="1100" b="1" dirty="0">
                 <a:solidFill>
                   <a:srgbClr val="000000"/>
                 </a:solidFill>
@@ -9066,7 +10400,7 @@
               <a:t>Repeat independently for each </a:t>
             </a:r>
             <a:r>
-              <a:rPr lang="en-US" sz="1100" dirty="0" err="1">
+              <a:rPr lang="en-US" sz="1100" b="1" dirty="0" err="1">
                 <a:solidFill>
                   <a:srgbClr val="000000"/>
                 </a:solidFill>
@@ -9076,7 +10410,7 @@
               <a:t>CPython</a:t>
             </a:r>
             <a:r>
-              <a:rPr lang="en-US" sz="1100" dirty="0">
+              <a:rPr lang="en-US" sz="1100" b="1" dirty="0">
                 <a:solidFill>
                   <a:srgbClr val="000000"/>
                 </a:solidFill>
@@ -9085,7 +10419,7 @@
               </a:rPr>
               <a:t> version</a:t>
             </a:r>
-            <a:endParaRPr lang="en-US" sz="1100" dirty="0"/>
+            <a:endParaRPr lang="en-US" sz="1100" b="1" dirty="0"/>
           </a:p>
         </p:txBody>
       </p:sp>
